--- a/deck/TRACE-Threat-Modelling-Framework.pptx
+++ b/deck/TRACE-Threat-Modelling-Framework.pptx
@@ -1207,7 +1207,7 @@
                 <a:ea typeface="BDO Grotesk"/>
                 <a:cs typeface="BDO Grotesk"/>
               </a:rPr>
-              <a:t>OAK TRACE / FRAMEWORK NOTE</a:t>
+              <a:t>TRACE / FRAMEWORK NOTE</a:t>
             </a:r>
           </a:p>
         </p:txBody>
@@ -1271,7 +1271,7 @@
                 <a:ea typeface="BDO Grotesk"/>
                 <a:cs typeface="BDO Grotesk"/>
               </a:rPr>
-              <a:t>Oak TRACE Threat Modeling Framework</a:t>
+              <a:t>TRACE Threat Modeling Framework</a:t>
             </a:r>
           </a:p>
         </p:txBody>
@@ -1335,7 +1335,7 @@
                 <a:ea typeface="BDO Grotesk"/>
                 <a:cs typeface="BDO Grotesk"/>
               </a:rPr>
-              <a:t>A Web3 design-risk method that turns heterogeneous protocol material into a structured model, then uses STRIDE, attack trees, and optional collusion analysis to produce decision-ready security work.</a:t>
+              <a:t>A method for modern decentralized organisations that turns heterogeneous source material into a structured model, then uses STRIDE, attack trees, and optional coordination analysis to produce decision-ready security work.</a:t>
             </a:r>
           </a:p>
         </p:txBody>
@@ -1574,7 +1574,7 @@
                 <a:ea typeface="BDO Grotesk"/>
                 <a:cs typeface="BDO Grotesk"/>
               </a:rPr>
-              <a:t>Why Web3 needs TRACE</a:t>
+              <a:t>Why modern organisations need TRACE</a:t>
             </a:r>
           </a:p>
         </p:txBody>
@@ -1642,7 +1642,7 @@
                 <a:ea typeface="BDO Grotesk"/>
                 <a:cs typeface="BDO Grotesk"/>
               </a:rPr>
-              <a:t>Web3 projects combine high-value assets, economic invariants, off-chain systems, and human control paths. Oak TRACE keeps these in one model: STRIDE for conventional computing risk, plus attack trees and collusion/consensus analysis for protocol risk.</a:t>
+              <a:t>Modern cloud-first organisations combine high-value assets, distributed authority, SaaS and cloud systems, remote operations, and human control paths. TRACE keeps these in one model: STRIDE for conventional computing risk, plus attack trees and coordination analysis for protocol, system, and organisation risk.</a:t>
             </a:r>
           </a:p>
         </p:txBody>
@@ -3333,7 +3333,7 @@
                 <a:ea typeface="BDO Grotesk"/>
                 <a:cs typeface="BDO Grotesk"/>
               </a:rPr>
-              <a:t>Economic and protocol properties that must hold.</a:t>
+              <a:t>Business, operational, economic, and technical properties that must hold.</a:t>
             </a:r>
           </a:p>
         </p:txBody>
@@ -4397,7 +4397,7 @@
                 <a:ea typeface="BDO Grotesk"/>
                 <a:cs typeface="BDO Grotesk"/>
               </a:rPr>
-              <a:t>Protocol docs and interviews</a:t>
+              <a:t>Specs, policies, and interviews</a:t>
             </a:r>
           </a:p>
         </p:txBody>
@@ -4828,7 +4828,7 @@
                 <a:ea typeface="BDO Grotesk"/>
                 <a:cs typeface="BDO Grotesk"/>
               </a:rPr>
-              <a:t>Oak TRACE Threat Modeling Framework</a:t>
+              <a:t>TRACE Threat Modeling Framework</a:t>
             </a:r>
           </a:p>
         </p:txBody>
@@ -5152,7 +5152,7 @@
                 <a:ea typeface="BDO Grotesk"/>
                 <a:cs typeface="BDO Grotesk"/>
               </a:rPr>
-              <a:t>OAK TRACE / OPERATING MODEL</a:t>
+              <a:t>TRACE / OPERATING MODEL</a:t>
             </a:r>
           </a:p>
         </p:txBody>
@@ -5284,7 +5284,7 @@
                 <a:ea typeface="BDO Grotesk"/>
                 <a:cs typeface="BDO Grotesk"/>
               </a:rPr>
-              <a:t>AI accelerates decomposition and coverage. Oak senior security experts own the assumptions, severity, plausibility, and recommendations.</a:t>
+              <a:t>AI accelerates decomposition and coverage. Senior security experts own the assumptions, severity, plausibility, and recommendations.</a:t>
             </a:r>
           </a:p>
         </p:txBody>
@@ -5649,7 +5649,7 @@
                 <a:ea typeface="BDO Grotesk"/>
                 <a:cs typeface="BDO Grotesk"/>
               </a:rPr>
-              <a:t>Docs, reviews, architecture, white papers, code, configs, and protocol context.</a:t>
+              <a:t>Docs, reviews, architecture, policies, code, configs, and organisational context.</a:t>
             </a:r>
           </a:p>
         </p:txBody>
@@ -6014,7 +6014,7 @@
                 <a:ea typeface="BDO Grotesk"/>
                 <a:cs typeface="BDO Grotesk"/>
               </a:rPr>
-              <a:t>Assets, actors, invariants, boundaries, value flows, roles, components.</a:t>
+              <a:t>Assets, actors, invariants, boundaries, value flows, authority paths, roles, components.</a:t>
             </a:r>
           </a:p>
         </p:txBody>
@@ -7049,7 +7049,7 @@
                 <a:ea typeface="BDO Grotesk"/>
                 <a:cs typeface="BDO Grotesk"/>
               </a:rPr>
-              <a:t>Collusion inspection</a:t>
+              <a:t>Coordination inspection</a:t>
             </a:r>
           </a:p>
         </p:txBody>
@@ -7113,7 +7113,7 @@
                 <a:ea typeface="BDO Grotesk"/>
                 <a:cs typeface="BDO Grotesk"/>
               </a:rPr>
-              <a:t>Optional pass for DAOs, validators, governance, committees, and multisigs.</a:t>
+              <a:t>Optional pass for governance bodies, committees, vendors, administrators, operators, and other actor groups.</a:t>
             </a:r>
           </a:p>
         </p:txBody>
@@ -7478,7 +7478,7 @@
                 <a:ea typeface="BDO Grotesk"/>
                 <a:cs typeface="BDO Grotesk"/>
               </a:rPr>
-              <a:t>Risk ranking, mitigations, open questions, and audit or launch guidance.</a:t>
+              <a:t>Risk ranking, mitigations, open questions, and assessment, audit, or launch guidance.</a:t>
             </a:r>
           </a:p>
         </p:txBody>
@@ -7750,7 +7750,7 @@
                 <a:ea typeface="BDO Grotesk"/>
                 <a:cs typeface="BDO Grotesk"/>
               </a:rPr>
-              <a:t>A deliberate sequential workflow uses AI for decomposition, coverage, and draft structure while Oak senior security experts own the risk decisions.</a:t>
+              <a:t>A deliberate sequential workflow uses AI for decomposition, coverage, and draft structure while senior security experts own the risk decisions.</a:t>
             </a:r>
           </a:p>
         </p:txBody>
@@ -7956,7 +7956,7 @@
                 <a:ea typeface="BDO Grotesk"/>
                 <a:cs typeface="BDO Grotesk"/>
               </a:rPr>
-              <a:t>Oak experts approve and complement assumptions, scope, and relevance.</a:t>
+              <a:t>Experts approve and complement assumptions, scope, and relevance.</a:t>
             </a:r>
           </a:p>
         </p:txBody>
@@ -8537,7 +8537,7 @@
                 <a:ea typeface="BDO Grotesk"/>
                 <a:cs typeface="BDO Grotesk"/>
               </a:rPr>
-              <a:t>Oak TRACE Threat Modeling Framework</a:t>
+              <a:t>TRACE Threat Modeling Framework</a:t>
             </a:r>
           </a:p>
         </p:txBody>
